--- a/presentation/Presentation_TaskPad_Internship.pptx
+++ b/presentation/Presentation_TaskPad_Internship.pptx
@@ -4,6 +4,9 @@
   <p:sldMasterIdLst>
     <p:sldMasterId id="2147483648" r:id="rId1"/>
   </p:sldMasterIdLst>
+  <p:notesMasterIdLst>
+    <p:notesMasterId r:id="rId14"/>
+  </p:notesMasterIdLst>
   <p:sldIdLst>
     <p:sldId id="256" r:id="rId2"/>
     <p:sldId id="257" r:id="rId3"/>
@@ -18,9 +21,6 @@
     <p:sldId id="266" r:id="rId12"/>
     <p:sldId id="267" r:id="rId13"/>
   </p:sldIdLst>
-  <p:notesMasterIdLst>
-    <p:notesMasterId r:id="rId14"/>
-  </p:notesMasterIdLst>
   <p:sldSz cx="12192000" cy="6858000"/>
   <p:notesSz cx="6858000" cy="12192000"/>
   <p:defaultTextStyle>
@@ -115,6 +115,11 @@
       </a:defRPr>
     </a:lvl9pPr>
   </p:defaultTextStyle>
+  <p:extLst>
+    <p:ext uri="{EFAFB233-063F-42B5-8137-9DF3F51BA10A}">
+      <p15:sldGuideLst xmlns:p15="http://schemas.microsoft.com/office/powerpoint/2012/main"/>
+    </p:ext>
+  </p:extLst>
 </p:presentation>
 </file>
 
@@ -140,234 +145,10 @@
           <a:chExt cx="0" cy="0"/>
         </a:xfrm>
       </p:grpSpPr>
-      <p:sp>
-        <p:nvSpPr>
-          <p:cNvPr id="2" name="Header Placeholder 1"/>
-          <p:cNvSpPr>
-            <a:spLocks noGrp="1"/>
-          </p:cNvSpPr>
-          <p:nvPr>
-            <p:ph type="hdr" sz="quarter"/>
-          </p:nvPr>
-        </p:nvSpPr>
-        <p:spPr>
-          <a:xfrm>
-            <a:off x="0" y="0"/>
-            <a:ext cx="2971800" cy="458788"/>
-          </a:xfrm>
-          <a:prstGeom prst="rect">
-            <a:avLst/>
-          </a:prstGeom>
-        </p:spPr>
-        <p:txBody>
-          <a:bodyPr vert="horz" lIns="91440" tIns="45720" rIns="91440" bIns="45720" rtlCol="0"/>
-          <a:lstStyle>
-            <a:lvl1pPr algn="l">
-              <a:defRPr sz="1200"/>
-            </a:lvl1pPr>
-          </a:lstStyle>
-          <a:p>
-            <a:endParaRPr lang="en-US"/>
-          </a:p>
-        </p:txBody>
-      </p:sp>
-      <p:sp>
-        <p:nvSpPr>
-          <p:cNvPr id="3" name="Date Placeholder 2"/>
-          <p:cNvSpPr>
-            <a:spLocks noGrp="1"/>
-          </p:cNvSpPr>
-          <p:nvPr>
-            <p:ph type="dt" idx="1"/>
-          </p:nvPr>
-        </p:nvSpPr>
-        <p:spPr>
-          <a:xfrm>
-            <a:off x="3884613" y="0"/>
-            <a:ext cx="2971800" cy="458788"/>
-          </a:xfrm>
-          <a:prstGeom prst="rect">
-            <a:avLst/>
-          </a:prstGeom>
-        </p:spPr>
-        <p:txBody>
-          <a:bodyPr vert="horz" lIns="91440" tIns="45720" rIns="91440" bIns="45720" rtlCol="0"/>
-          <a:lstStyle>
-            <a:lvl1pPr algn="r">
-              <a:defRPr sz="1200"/>
-            </a:lvl1pPr>
-          </a:lstStyle>
-          <a:p>
-            <a:fld id="{5282F153-3F37-0F45-9E97-73ACFA13230C}" type="datetimeFigureOut">
-              <a:rPr lang="en-US"/>
-              <a:t>7/23/19</a:t>
-            </a:fld>
-            <a:endParaRPr lang="en-US"/>
-          </a:p>
-        </p:txBody>
-      </p:sp>
-      <p:sp>
-        <p:nvSpPr>
-          <p:cNvPr id="4" name="Slide Image Placeholder 3"/>
-          <p:cNvSpPr>
-            <a:spLocks noGrp="1" noRot="1" noChangeAspect="1"/>
-          </p:cNvSpPr>
-          <p:nvPr>
-            <p:ph type="sldImg" idx="2"/>
-          </p:nvPr>
-        </p:nvSpPr>
-        <p:spPr>
-          <a:xfrm>
-            <a:off x="685800" y="1143000"/>
-            <a:ext cx="5486400" cy="3086100"/>
-          </a:xfrm>
-          <a:prstGeom prst="rect">
-            <a:avLst/>
-          </a:prstGeom>
-          <a:noFill/>
-          <a:ln w="12700">
-            <a:solidFill>
-              <a:prstClr val="black"/>
-            </a:solidFill>
-          </a:ln>
-        </p:spPr>
-        <p:txBody>
-          <a:bodyPr vert="horz" lIns="91440" tIns="45720" rIns="91440" bIns="45720" rtlCol="0" anchor="ctr"/>
-          <a:lstStyle/>
-          <a:p>
-            <a:endParaRPr lang="en-US"/>
-          </a:p>
-        </p:txBody>
-      </p:sp>
-      <p:sp>
-        <p:nvSpPr>
-          <p:cNvPr id="5" name="Notes Placeholder 4"/>
-          <p:cNvSpPr>
-            <a:spLocks noGrp="1"/>
-          </p:cNvSpPr>
-          <p:nvPr>
-            <p:ph type="body" sz="quarter" idx="3"/>
-          </p:nvPr>
-        </p:nvSpPr>
-        <p:spPr>
-          <a:xfrm>
-            <a:off x="685800" y="4400550"/>
-            <a:ext cx="5486400" cy="3600450"/>
-          </a:xfrm>
-          <a:prstGeom prst="rect">
-            <a:avLst/>
-          </a:prstGeom>
-        </p:spPr>
-        <p:txBody>
-          <a:bodyPr vert="horz" lIns="91440" tIns="45720" rIns="91440" bIns="45720" rtlCol="0"/>
-          <a:lstStyle/>
-          <a:p>
-            <a:pPr lvl="0"/>
-            <a:r>
-              <a:rPr lang="en-US"/>
-              <a:t>Click to edit Master text styles</a:t>
-            </a:r>
-          </a:p>
-          <a:p>
-            <a:pPr lvl="1"/>
-            <a:r>
-              <a:rPr lang="en-US"/>
-              <a:t>Second level</a:t>
-            </a:r>
-          </a:p>
-          <a:p>
-            <a:pPr lvl="2"/>
-            <a:r>
-              <a:rPr lang="en-US"/>
-              <a:t>Third level</a:t>
-            </a:r>
-          </a:p>
-          <a:p>
-            <a:pPr lvl="3"/>
-            <a:r>
-              <a:rPr lang="en-US"/>
-              <a:t>Fourth level</a:t>
-            </a:r>
-          </a:p>
-          <a:p>
-            <a:pPr lvl="4"/>
-            <a:r>
-              <a:rPr lang="en-US"/>
-              <a:t>Fifth level</a:t>
-            </a:r>
-          </a:p>
-        </p:txBody>
-      </p:sp>
-      <p:sp>
-        <p:nvSpPr>
-          <p:cNvPr id="6" name="Footer Placeholder 5"/>
-          <p:cNvSpPr>
-            <a:spLocks noGrp="1"/>
-          </p:cNvSpPr>
-          <p:nvPr>
-            <p:ph type="ftr" sz="quarter" idx="4"/>
-          </p:nvPr>
-        </p:nvSpPr>
-        <p:spPr>
-          <a:xfrm>
-            <a:off x="0" y="8685213"/>
-            <a:ext cx="2971800" cy="458787"/>
-          </a:xfrm>
-          <a:prstGeom prst="rect">
-            <a:avLst/>
-          </a:prstGeom>
-        </p:spPr>
-        <p:txBody>
-          <a:bodyPr vert="horz" lIns="91440" tIns="45720" rIns="91440" bIns="45720" rtlCol="0" anchor="b"/>
-          <a:lstStyle>
-            <a:lvl1pPr algn="l">
-              <a:defRPr sz="1200"/>
-            </a:lvl1pPr>
-          </a:lstStyle>
-          <a:p>
-            <a:endParaRPr lang="en-US"/>
-          </a:p>
-        </p:txBody>
-      </p:sp>
-      <p:sp>
-        <p:nvSpPr>
-          <p:cNvPr id="7" name="Slide Number Placeholder 6"/>
-          <p:cNvSpPr>
-            <a:spLocks noGrp="1"/>
-          </p:cNvSpPr>
-          <p:nvPr>
-            <p:ph type="sldNum" sz="quarter" idx="5"/>
-          </p:nvPr>
-        </p:nvSpPr>
-        <p:spPr>
-          <a:xfrm>
-            <a:off x="3884613" y="8685213"/>
-            <a:ext cx="2971800" cy="458787"/>
-          </a:xfrm>
-          <a:prstGeom prst="rect">
-            <a:avLst/>
-          </a:prstGeom>
-        </p:spPr>
-        <p:txBody>
-          <a:bodyPr vert="horz" lIns="91440" tIns="45720" rIns="91440" bIns="45720" rtlCol="0" anchor="b"/>
-          <a:lstStyle>
-            <a:lvl1pPr algn="r">
-              <a:defRPr sz="1200"/>
-            </a:lvl1pPr>
-          </a:lstStyle>
-          <a:p>
-            <a:fld id="{CE5E9CC1-C706-0F49-92D6-E571CC5EEA8F}" type="slidenum">
-              <a:rPr lang="en-US"/>
-              <a:t>‹#›</a:t>
-            </a:fld>
-            <a:endParaRPr lang="en-US"/>
-          </a:p>
-        </p:txBody>
-      </p:sp>
     </p:spTree>
     <p:extLst>
       <p:ext uri="{BB962C8B-B14F-4D97-AF65-F5344CB8AC3E}">
-        <p14:creationId xmlns:p14="http://schemas.microsoft.com/office/powerpoint/2010/main" val="1024086991"/>
+        <p14:creationId xmlns:p14="http://schemas.microsoft.com/office/powerpoint/2010/main" val="1310061894"/>
       </p:ext>
     </p:extLst>
   </p:cSld>
@@ -511,10 +292,6 @@
           <a:bodyPr/>
           <a:lstStyle/>
           <a:p>
-            <a:r>
-              <a:rPr lang="en-US" dirty="0"/>
-              <a:t/>
-            </a:r>
             <a:endParaRPr lang="en-US" dirty="0"/>
           </a:p>
         </p:txBody>
@@ -599,10 +376,6 @@
           <a:bodyPr/>
           <a:lstStyle/>
           <a:p>
-            <a:r>
-              <a:rPr lang="en-US" dirty="0"/>
-              <a:t/>
-            </a:r>
             <a:endParaRPr lang="en-US" dirty="0"/>
           </a:p>
         </p:txBody>
@@ -687,10 +460,6 @@
           <a:bodyPr/>
           <a:lstStyle/>
           <a:p>
-            <a:r>
-              <a:rPr lang="en-US" dirty="0"/>
-              <a:t/>
-            </a:r>
             <a:endParaRPr lang="en-US" dirty="0"/>
           </a:p>
         </p:txBody>
@@ -775,10 +544,6 @@
           <a:bodyPr/>
           <a:lstStyle/>
           <a:p>
-            <a:r>
-              <a:rPr lang="en-US" dirty="0"/>
-              <a:t/>
-            </a:r>
             <a:endParaRPr lang="en-US" dirty="0"/>
           </a:p>
         </p:txBody>
@@ -863,10 +628,6 @@
           <a:bodyPr/>
           <a:lstStyle/>
           <a:p>
-            <a:r>
-              <a:rPr lang="en-US" dirty="0"/>
-              <a:t/>
-            </a:r>
             <a:endParaRPr lang="en-US" dirty="0"/>
           </a:p>
         </p:txBody>
@@ -951,10 +712,6 @@
           <a:bodyPr/>
           <a:lstStyle/>
           <a:p>
-            <a:r>
-              <a:rPr lang="en-US" dirty="0"/>
-              <a:t/>
-            </a:r>
             <a:endParaRPr lang="en-US" dirty="0"/>
           </a:p>
         </p:txBody>
@@ -1039,10 +796,6 @@
           <a:bodyPr/>
           <a:lstStyle/>
           <a:p>
-            <a:r>
-              <a:rPr lang="en-US" dirty="0"/>
-              <a:t/>
-            </a:r>
             <a:endParaRPr lang="en-US" dirty="0"/>
           </a:p>
         </p:txBody>
@@ -1127,10 +880,6 @@
           <a:bodyPr/>
           <a:lstStyle/>
           <a:p>
-            <a:r>
-              <a:rPr lang="en-US" dirty="0"/>
-              <a:t/>
-            </a:r>
             <a:endParaRPr lang="en-US" dirty="0"/>
           </a:p>
         </p:txBody>
@@ -1215,10 +964,6 @@
           <a:bodyPr/>
           <a:lstStyle/>
           <a:p>
-            <a:r>
-              <a:rPr lang="en-US" dirty="0"/>
-              <a:t/>
-            </a:r>
             <a:endParaRPr lang="en-US" dirty="0"/>
           </a:p>
         </p:txBody>
@@ -1303,10 +1048,6 @@
           <a:bodyPr/>
           <a:lstStyle/>
           <a:p>
-            <a:r>
-              <a:rPr lang="en-US" dirty="0"/>
-              <a:t/>
-            </a:r>
             <a:endParaRPr lang="en-US" dirty="0"/>
           </a:p>
         </p:txBody>
@@ -1391,10 +1132,6 @@
           <a:bodyPr/>
           <a:lstStyle/>
           <a:p>
-            <a:r>
-              <a:rPr lang="en-US" dirty="0"/>
-              <a:t/>
-            </a:r>
             <a:endParaRPr lang="en-US" dirty="0"/>
           </a:p>
         </p:txBody>
@@ -1479,10 +1216,6 @@
           <a:bodyPr/>
           <a:lstStyle/>
           <a:p>
-            <a:r>
-              <a:rPr lang="en-US" dirty="0"/>
-              <a:t/>
-            </a:r>
             <a:endParaRPr lang="en-US" dirty="0"/>
           </a:p>
         </p:txBody>
@@ -1556,6 +1289,11 @@
 <file path=ppt/slideMasters/slideMaster1.xml><?xml version="1.0" encoding="utf-8"?>
 <p:sldMaster xmlns:a="http://schemas.openxmlformats.org/drawingml/2006/main" xmlns:r="http://schemas.openxmlformats.org/officeDocument/2006/relationships" xmlns:p="http://schemas.openxmlformats.org/presentationml/2006/main">
   <p:cSld>
+    <p:bg>
+      <p:bgRef idx="1001">
+        <a:schemeClr val="bg1"/>
+      </p:bgRef>
+    </p:bg>
     <p:spTree>
       <p:nvGrpSpPr>
         <p:cNvPr id="1" name=""/>
@@ -1875,6 +1613,13 @@
             <a:prstDash val="solid"/>
           </a:ln>
         </p:spPr>
+        <p:txBody>
+          <a:bodyPr/>
+          <a:lstStyle/>
+          <a:p>
+            <a:endParaRPr lang="fr-CM"/>
+          </a:p>
+        </p:txBody>
       </p:sp>
       <p:sp>
         <p:nvSpPr>
@@ -1899,7 +1644,7 @@
           </a:bodyPr>
           <a:lstStyle/>
           <a:p>
-            <a:pPr algn="l" indent="0" marL="0">
+            <a:pPr marL="0" indent="0" algn="l">
               <a:buNone/>
             </a:pPr>
             <a:r>
@@ -1937,7 +1682,7 @@
           </a:bodyPr>
           <a:lstStyle/>
           <a:p>
-            <a:pPr algn="l" indent="0" marL="0">
+            <a:pPr marL="0" indent="0" algn="l">
               <a:buNone/>
             </a:pPr>
             <a:r>
@@ -1975,7 +1720,7 @@
           </a:bodyPr>
           <a:lstStyle/>
           <a:p>
-            <a:pPr algn="l" indent="0" marL="0">
+            <a:pPr marL="0" indent="0" algn="l">
               <a:buNone/>
             </a:pPr>
             <a:r>
@@ -2013,7 +1758,7 @@
           </a:bodyPr>
           <a:lstStyle/>
           <a:p>
-            <a:pPr algn="l" indent="0" marL="0">
+            <a:pPr marL="0" indent="0" algn="l">
               <a:buNone/>
             </a:pPr>
             <a:r>
@@ -2027,7 +1772,7 @@
             <a:endParaRPr lang="en-US" sz="1600" dirty="0"/>
           </a:p>
           <a:p>
-            <a:pPr algn="l" indent="0" marL="0">
+            <a:pPr marL="0" indent="0" algn="l">
               <a:buNone/>
             </a:pPr>
             <a:r>
@@ -2065,7 +1810,7 @@
           </a:bodyPr>
           <a:lstStyle/>
           <a:p>
-            <a:pPr algn="l" indent="0" marL="0">
+            <a:pPr marL="0" indent="0" algn="l">
               <a:buNone/>
             </a:pPr>
             <a:r>
@@ -2133,6 +1878,13 @@
             <a:prstDash val="solid"/>
           </a:ln>
         </p:spPr>
+        <p:txBody>
+          <a:bodyPr/>
+          <a:lstStyle/>
+          <a:p>
+            <a:endParaRPr lang="fr-CM"/>
+          </a:p>
+        </p:txBody>
       </p:sp>
       <p:sp>
         <p:nvSpPr>
@@ -2162,6 +1914,13 @@
             <a:prstDash val="solid"/>
           </a:ln>
         </p:spPr>
+        <p:txBody>
+          <a:bodyPr/>
+          <a:lstStyle/>
+          <a:p>
+            <a:endParaRPr lang="fr-CM"/>
+          </a:p>
+        </p:txBody>
       </p:sp>
       <p:sp>
         <p:nvSpPr>
@@ -2186,7 +1945,7 @@
           </a:bodyPr>
           <a:lstStyle/>
           <a:p>
-            <a:pPr algn="l" indent="0" marL="0">
+            <a:pPr marL="0" indent="0" algn="l">
               <a:buNone/>
             </a:pPr>
             <a:r>
@@ -2224,7 +1983,7 @@
           </a:bodyPr>
           <a:lstStyle/>
           <a:p>
-            <a:pPr algn="l" indent="0" marL="0">
+            <a:pPr marL="0" indent="0" algn="l">
               <a:buNone/>
             </a:pPr>
             <a:r>
@@ -2267,6 +2026,13 @@
             <a:prstDash val="solid"/>
           </a:ln>
         </p:spPr>
+        <p:txBody>
+          <a:bodyPr/>
+          <a:lstStyle/>
+          <a:p>
+            <a:endParaRPr lang="fr-CM"/>
+          </a:p>
+        </p:txBody>
       </p:sp>
       <p:sp>
         <p:nvSpPr>
@@ -2291,7 +2057,7 @@
           </a:bodyPr>
           <a:lstStyle/>
           <a:p>
-            <a:pPr algn="l" indent="0" marL="0">
+            <a:pPr marL="0" indent="0" algn="l">
               <a:buNone/>
             </a:pPr>
             <a:r>
@@ -2329,7 +2095,7 @@
           </a:bodyPr>
           <a:lstStyle/>
           <a:p>
-            <a:pPr algn="l" indent="0" marL="0">
+            <a:pPr marL="0" indent="0" algn="l">
               <a:buNone/>
             </a:pPr>
             <a:r>
@@ -2372,6 +2138,13 @@
             <a:prstDash val="solid"/>
           </a:ln>
         </p:spPr>
+        <p:txBody>
+          <a:bodyPr/>
+          <a:lstStyle/>
+          <a:p>
+            <a:endParaRPr lang="fr-CM"/>
+          </a:p>
+        </p:txBody>
       </p:sp>
       <p:sp>
         <p:nvSpPr>
@@ -2396,7 +2169,7 @@
           </a:bodyPr>
           <a:lstStyle/>
           <a:p>
-            <a:pPr algn="l" indent="0" marL="0">
+            <a:pPr marL="0" indent="0" algn="l">
               <a:buNone/>
             </a:pPr>
             <a:r>
@@ -2434,7 +2207,7 @@
           </a:bodyPr>
           <a:lstStyle/>
           <a:p>
-            <a:pPr algn="l" indent="0" marL="0">
+            <a:pPr marL="0" indent="0" algn="l">
               <a:buNone/>
             </a:pPr>
             <a:r>
@@ -2477,6 +2250,13 @@
             <a:prstDash val="solid"/>
           </a:ln>
         </p:spPr>
+        <p:txBody>
+          <a:bodyPr/>
+          <a:lstStyle/>
+          <a:p>
+            <a:endParaRPr lang="fr-CM"/>
+          </a:p>
+        </p:txBody>
       </p:sp>
       <p:sp>
         <p:nvSpPr>
@@ -2501,7 +2281,7 @@
           </a:bodyPr>
           <a:lstStyle/>
           <a:p>
-            <a:pPr algn="l" indent="0" marL="0">
+            <a:pPr marL="0" indent="0" algn="l">
               <a:buNone/>
             </a:pPr>
             <a:r>
@@ -2539,7 +2319,7 @@
           </a:bodyPr>
           <a:lstStyle/>
           <a:p>
-            <a:pPr algn="l" indent="0" marL="0">
+            <a:pPr marL="0" indent="0" algn="l">
               <a:buNone/>
             </a:pPr>
             <a:r>
@@ -2582,6 +2362,13 @@
             <a:prstDash val="solid"/>
           </a:ln>
         </p:spPr>
+        <p:txBody>
+          <a:bodyPr/>
+          <a:lstStyle/>
+          <a:p>
+            <a:endParaRPr lang="fr-CM"/>
+          </a:p>
+        </p:txBody>
       </p:sp>
       <p:sp>
         <p:nvSpPr>
@@ -2606,7 +2393,7 @@
           </a:bodyPr>
           <a:lstStyle/>
           <a:p>
-            <a:pPr algn="l" indent="0" marL="0">
+            <a:pPr marL="0" indent="0" algn="l">
               <a:buNone/>
             </a:pPr>
             <a:r>
@@ -2644,7 +2431,7 @@
           </a:bodyPr>
           <a:lstStyle/>
           <a:p>
-            <a:pPr algn="l" indent="0" marL="0">
+            <a:pPr marL="0" indent="0" algn="l">
               <a:buNone/>
             </a:pPr>
             <a:r>
@@ -2682,7 +2469,7 @@
           </a:bodyPr>
           <a:lstStyle/>
           <a:p>
-            <a:pPr algn="l" indent="0" marL="0">
+            <a:pPr marL="0" indent="0" algn="l">
               <a:buNone/>
             </a:pPr>
             <a:r>
@@ -2750,6 +2537,13 @@
             <a:prstDash val="solid"/>
           </a:ln>
         </p:spPr>
+        <p:txBody>
+          <a:bodyPr/>
+          <a:lstStyle/>
+          <a:p>
+            <a:endParaRPr lang="fr-CM"/>
+          </a:p>
+        </p:txBody>
       </p:sp>
       <p:sp>
         <p:nvSpPr>
@@ -2779,6 +2573,13 @@
             <a:prstDash val="solid"/>
           </a:ln>
         </p:spPr>
+        <p:txBody>
+          <a:bodyPr/>
+          <a:lstStyle/>
+          <a:p>
+            <a:endParaRPr lang="fr-CM"/>
+          </a:p>
+        </p:txBody>
       </p:sp>
       <p:sp>
         <p:nvSpPr>
@@ -2803,7 +2604,7 @@
           </a:bodyPr>
           <a:lstStyle/>
           <a:p>
-            <a:pPr algn="l" indent="0" marL="0">
+            <a:pPr marL="0" indent="0" algn="l">
               <a:buNone/>
             </a:pPr>
             <a:r>
@@ -2841,7 +2642,7 @@
           </a:bodyPr>
           <a:lstStyle/>
           <a:p>
-            <a:pPr algn="l" indent="0" marL="0">
+            <a:pPr marL="0" indent="0" algn="l">
               <a:buNone/>
             </a:pPr>
             <a:r>
@@ -2884,6 +2685,13 @@
             <a:prstDash val="solid"/>
           </a:ln>
         </p:spPr>
+        <p:txBody>
+          <a:bodyPr/>
+          <a:lstStyle/>
+          <a:p>
+            <a:endParaRPr lang="fr-CM"/>
+          </a:p>
+        </p:txBody>
       </p:sp>
       <p:sp>
         <p:nvSpPr>
@@ -2908,7 +2716,7 @@
           </a:bodyPr>
           <a:lstStyle/>
           <a:p>
-            <a:pPr algn="l" indent="0" marL="0">
+            <a:pPr marL="0" indent="0" algn="l">
               <a:buNone/>
             </a:pPr>
             <a:r>
@@ -2946,7 +2754,7 @@
           </a:bodyPr>
           <a:lstStyle/>
           <a:p>
-            <a:pPr algn="l" indent="0" marL="0">
+            <a:pPr marL="0" indent="0" algn="l">
               <a:buNone/>
             </a:pPr>
             <a:r>
@@ -2989,6 +2797,13 @@
             <a:prstDash val="solid"/>
           </a:ln>
         </p:spPr>
+        <p:txBody>
+          <a:bodyPr/>
+          <a:lstStyle/>
+          <a:p>
+            <a:endParaRPr lang="fr-CM"/>
+          </a:p>
+        </p:txBody>
       </p:sp>
       <p:sp>
         <p:nvSpPr>
@@ -3013,7 +2828,7 @@
           </a:bodyPr>
           <a:lstStyle/>
           <a:p>
-            <a:pPr algn="l" indent="0" marL="0">
+            <a:pPr marL="0" indent="0" algn="l">
               <a:buNone/>
             </a:pPr>
             <a:r>
@@ -3051,7 +2866,7 @@
           </a:bodyPr>
           <a:lstStyle/>
           <a:p>
-            <a:pPr algn="l" indent="0" marL="0">
+            <a:pPr marL="0" indent="0" algn="l">
               <a:buNone/>
             </a:pPr>
             <a:r>
@@ -3094,6 +2909,13 @@
             <a:prstDash val="solid"/>
           </a:ln>
         </p:spPr>
+        <p:txBody>
+          <a:bodyPr/>
+          <a:lstStyle/>
+          <a:p>
+            <a:endParaRPr lang="fr-CM"/>
+          </a:p>
+        </p:txBody>
       </p:sp>
       <p:sp>
         <p:nvSpPr>
@@ -3118,7 +2940,7 @@
           </a:bodyPr>
           <a:lstStyle/>
           <a:p>
-            <a:pPr algn="l" indent="0" marL="0">
+            <a:pPr marL="0" indent="0" algn="l">
               <a:buNone/>
             </a:pPr>
             <a:r>
@@ -3156,7 +2978,7 @@
           </a:bodyPr>
           <a:lstStyle/>
           <a:p>
-            <a:pPr algn="l" indent="0" marL="0">
+            <a:pPr marL="0" indent="0" algn="l">
               <a:buNone/>
             </a:pPr>
             <a:r>
@@ -3199,6 +3021,13 @@
             <a:prstDash val="solid"/>
           </a:ln>
         </p:spPr>
+        <p:txBody>
+          <a:bodyPr/>
+          <a:lstStyle/>
+          <a:p>
+            <a:endParaRPr lang="fr-CM"/>
+          </a:p>
+        </p:txBody>
       </p:sp>
       <p:sp>
         <p:nvSpPr>
@@ -3223,7 +3052,7 @@
           </a:bodyPr>
           <a:lstStyle/>
           <a:p>
-            <a:pPr algn="l" indent="0" marL="0">
+            <a:pPr marL="0" indent="0" algn="l">
               <a:buNone/>
             </a:pPr>
             <a:r>
@@ -3261,7 +3090,7 @@
           </a:bodyPr>
           <a:lstStyle/>
           <a:p>
-            <a:pPr algn="l" indent="0" marL="0">
+            <a:pPr marL="0" indent="0" algn="l">
               <a:buNone/>
             </a:pPr>
             <a:r>
@@ -3299,7 +3128,7 @@
           </a:bodyPr>
           <a:lstStyle/>
           <a:p>
-            <a:pPr algn="l" indent="0" marL="0">
+            <a:pPr marL="0" indent="0" algn="l">
               <a:buNone/>
             </a:pPr>
             <a:r>
@@ -3367,6 +3196,13 @@
             <a:prstDash val="solid"/>
           </a:ln>
         </p:spPr>
+        <p:txBody>
+          <a:bodyPr/>
+          <a:lstStyle/>
+          <a:p>
+            <a:endParaRPr lang="fr-CM"/>
+          </a:p>
+        </p:txBody>
       </p:sp>
       <p:sp>
         <p:nvSpPr>
@@ -3391,7 +3227,7 @@
           </a:bodyPr>
           <a:lstStyle/>
           <a:p>
-            <a:pPr algn="l" indent="0" marL="0">
+            <a:pPr marL="0" indent="0" algn="l">
               <a:buNone/>
             </a:pPr>
             <a:r>
@@ -3429,7 +3265,7 @@
           </a:bodyPr>
           <a:lstStyle/>
           <a:p>
-            <a:pPr algn="l" indent="0" marL="0">
+            <a:pPr marL="0" indent="0" algn="l">
               <a:buNone/>
             </a:pPr>
             <a:r>
@@ -3467,7 +3303,7 @@
           </a:bodyPr>
           <a:lstStyle/>
           <a:p>
-            <a:pPr algn="l" indent="0" marL="0">
+            <a:pPr marL="0" indent="0" algn="l">
               <a:buNone/>
             </a:pPr>
             <a:r>
@@ -3481,7 +3317,7 @@
             <a:endParaRPr lang="en-US" sz="1700" dirty="0"/>
           </a:p>
           <a:p>
-            <a:pPr algn="l" indent="0" marL="0">
+            <a:pPr marL="0" indent="0" algn="l">
               <a:buNone/>
             </a:pPr>
             <a:r>
@@ -3495,7 +3331,7 @@
             <a:endParaRPr lang="en-US" sz="1700" dirty="0"/>
           </a:p>
           <a:p>
-            <a:pPr algn="l" indent="0" marL="0">
+            <a:pPr marL="0" indent="0" algn="l">
               <a:buNone/>
             </a:pPr>
             <a:r>
@@ -3533,7 +3369,7 @@
           </a:bodyPr>
           <a:lstStyle/>
           <a:p>
-            <a:pPr algn="l" indent="0" marL="0">
+            <a:pPr marL="0" indent="0" algn="l">
               <a:buNone/>
             </a:pPr>
             <a:r>
@@ -3581,7 +3417,7 @@
         </p:nvSpPr>
         <p:spPr>
           <a:xfrm>
-            <a:off x="0" y="0"/>
+            <a:off x="30632" y="68580"/>
             <a:ext cx="12191695" cy="6858000"/>
           </a:xfrm>
           <a:prstGeom prst="roundRect">
@@ -3601,6 +3437,13 @@
             <a:prstDash val="solid"/>
           </a:ln>
         </p:spPr>
+        <p:txBody>
+          <a:bodyPr/>
+          <a:lstStyle/>
+          <a:p>
+            <a:endParaRPr lang="fr-CM"/>
+          </a:p>
+        </p:txBody>
       </p:sp>
       <p:sp>
         <p:nvSpPr>
@@ -3630,6 +3473,13 @@
             <a:prstDash val="solid"/>
           </a:ln>
         </p:spPr>
+        <p:txBody>
+          <a:bodyPr/>
+          <a:lstStyle/>
+          <a:p>
+            <a:endParaRPr lang="fr-CM"/>
+          </a:p>
+        </p:txBody>
       </p:sp>
       <p:sp>
         <p:nvSpPr>
@@ -3654,7 +3504,7 @@
           </a:bodyPr>
           <a:lstStyle/>
           <a:p>
-            <a:pPr algn="l" indent="0" marL="0">
+            <a:pPr marL="0" indent="0" algn="l">
               <a:buNone/>
             </a:pPr>
             <a:r>
@@ -3692,7 +3542,7 @@
           </a:bodyPr>
           <a:lstStyle/>
           <a:p>
-            <a:pPr algn="l" indent="0" marL="0">
+            <a:pPr marL="0" indent="0" algn="l">
               <a:buNone/>
             </a:pPr>
             <a:r>
@@ -3735,6 +3585,13 @@
             <a:prstDash val="solid"/>
           </a:ln>
         </p:spPr>
+        <p:txBody>
+          <a:bodyPr/>
+          <a:lstStyle/>
+          <a:p>
+            <a:endParaRPr lang="fr-CM"/>
+          </a:p>
+        </p:txBody>
       </p:sp>
       <p:sp>
         <p:nvSpPr>
@@ -3759,7 +3616,7 @@
           </a:bodyPr>
           <a:lstStyle/>
           <a:p>
-            <a:pPr algn="l" indent="0" marL="0">
+            <a:pPr marL="0" indent="0" algn="l">
               <a:buNone/>
             </a:pPr>
             <a:r>
@@ -3797,7 +3654,7 @@
           </a:bodyPr>
           <a:lstStyle/>
           <a:p>
-            <a:pPr algn="l" indent="0" marL="0">
+            <a:pPr marL="0" indent="0" algn="l">
               <a:buNone/>
             </a:pPr>
             <a:r>
@@ -3840,6 +3697,13 @@
             <a:prstDash val="solid"/>
           </a:ln>
         </p:spPr>
+        <p:txBody>
+          <a:bodyPr/>
+          <a:lstStyle/>
+          <a:p>
+            <a:endParaRPr lang="fr-CM"/>
+          </a:p>
+        </p:txBody>
       </p:sp>
       <p:sp>
         <p:nvSpPr>
@@ -3864,7 +3728,7 @@
           </a:bodyPr>
           <a:lstStyle/>
           <a:p>
-            <a:pPr algn="l" indent="0" marL="0">
+            <a:pPr marL="0" indent="0" algn="l">
               <a:buNone/>
             </a:pPr>
             <a:r>
@@ -3902,7 +3766,7 @@
           </a:bodyPr>
           <a:lstStyle/>
           <a:p>
-            <a:pPr algn="l" indent="0" marL="0">
+            <a:pPr marL="0" indent="0" algn="l">
               <a:buNone/>
             </a:pPr>
             <a:r>
@@ -3945,6 +3809,13 @@
             <a:prstDash val="solid"/>
           </a:ln>
         </p:spPr>
+        <p:txBody>
+          <a:bodyPr/>
+          <a:lstStyle/>
+          <a:p>
+            <a:endParaRPr lang="fr-CM"/>
+          </a:p>
+        </p:txBody>
       </p:sp>
       <p:sp>
         <p:nvSpPr>
@@ -3969,7 +3840,7 @@
           </a:bodyPr>
           <a:lstStyle/>
           <a:p>
-            <a:pPr algn="l" indent="0" marL="0">
+            <a:pPr marL="0" indent="0" algn="l">
               <a:buNone/>
             </a:pPr>
             <a:r>
@@ -4007,7 +3878,7 @@
           </a:bodyPr>
           <a:lstStyle/>
           <a:p>
-            <a:pPr algn="l" indent="0" marL="0">
+            <a:pPr marL="0" indent="0" algn="l">
               <a:buNone/>
             </a:pPr>
             <a:r>
@@ -4050,6 +3921,13 @@
             <a:prstDash val="solid"/>
           </a:ln>
         </p:spPr>
+        <p:txBody>
+          <a:bodyPr/>
+          <a:lstStyle/>
+          <a:p>
+            <a:endParaRPr lang="fr-CM"/>
+          </a:p>
+        </p:txBody>
       </p:sp>
       <p:sp>
         <p:nvSpPr>
@@ -4074,7 +3952,7 @@
           </a:bodyPr>
           <a:lstStyle/>
           <a:p>
-            <a:pPr algn="l" indent="0" marL="0">
+            <a:pPr marL="0" indent="0" algn="l">
               <a:buNone/>
             </a:pPr>
             <a:r>
@@ -4112,7 +3990,7 @@
           </a:bodyPr>
           <a:lstStyle/>
           <a:p>
-            <a:pPr algn="l" indent="0" marL="0">
+            <a:pPr marL="0" indent="0" algn="l">
               <a:buNone/>
             </a:pPr>
             <a:r>
@@ -4150,7 +4028,7 @@
           </a:bodyPr>
           <a:lstStyle/>
           <a:p>
-            <a:pPr algn="l" indent="0" marL="0">
+            <a:pPr marL="0" indent="0" algn="l">
               <a:buNone/>
             </a:pPr>
             <a:r>
@@ -4218,6 +4096,13 @@
             <a:prstDash val="solid"/>
           </a:ln>
         </p:spPr>
+        <p:txBody>
+          <a:bodyPr/>
+          <a:lstStyle/>
+          <a:p>
+            <a:endParaRPr lang="fr-CM"/>
+          </a:p>
+        </p:txBody>
       </p:sp>
       <p:sp>
         <p:nvSpPr>
@@ -4247,6 +4132,13 @@
             <a:prstDash val="solid"/>
           </a:ln>
         </p:spPr>
+        <p:txBody>
+          <a:bodyPr/>
+          <a:lstStyle/>
+          <a:p>
+            <a:endParaRPr lang="fr-CM"/>
+          </a:p>
+        </p:txBody>
       </p:sp>
       <p:sp>
         <p:nvSpPr>
@@ -4271,7 +4163,7 @@
           </a:bodyPr>
           <a:lstStyle/>
           <a:p>
-            <a:pPr algn="l" indent="0" marL="0">
+            <a:pPr marL="0" indent="0" algn="l">
               <a:buNone/>
             </a:pPr>
             <a:r>
@@ -4309,7 +4201,7 @@
           </a:bodyPr>
           <a:lstStyle/>
           <a:p>
-            <a:pPr algn="l" indent="0" marL="0">
+            <a:pPr marL="0" indent="0" algn="l">
               <a:buNone/>
             </a:pPr>
             <a:r>
@@ -4352,6 +4244,13 @@
             <a:prstDash val="solid"/>
           </a:ln>
         </p:spPr>
+        <p:txBody>
+          <a:bodyPr/>
+          <a:lstStyle/>
+          <a:p>
+            <a:endParaRPr lang="fr-CM"/>
+          </a:p>
+        </p:txBody>
       </p:sp>
       <p:sp>
         <p:nvSpPr>
@@ -4376,7 +4275,7 @@
           </a:bodyPr>
           <a:lstStyle/>
           <a:p>
-            <a:pPr algn="l" indent="0" marL="0">
+            <a:pPr marL="0" indent="0" algn="l">
               <a:buNone/>
             </a:pPr>
             <a:r>
@@ -4414,7 +4313,7 @@
           </a:bodyPr>
           <a:lstStyle/>
           <a:p>
-            <a:pPr algn="l" indent="0" marL="0">
+            <a:pPr marL="0" indent="0" algn="l">
               <a:buNone/>
             </a:pPr>
             <a:r>
@@ -4457,6 +4356,13 @@
             <a:prstDash val="solid"/>
           </a:ln>
         </p:spPr>
+        <p:txBody>
+          <a:bodyPr/>
+          <a:lstStyle/>
+          <a:p>
+            <a:endParaRPr lang="fr-CM"/>
+          </a:p>
+        </p:txBody>
       </p:sp>
       <p:sp>
         <p:nvSpPr>
@@ -4481,7 +4387,7 @@
           </a:bodyPr>
           <a:lstStyle/>
           <a:p>
-            <a:pPr algn="l" indent="0" marL="0">
+            <a:pPr marL="0" indent="0" algn="l">
               <a:buNone/>
             </a:pPr>
             <a:r>
@@ -4519,7 +4425,7 @@
           </a:bodyPr>
           <a:lstStyle/>
           <a:p>
-            <a:pPr algn="l" indent="0" marL="0">
+            <a:pPr marL="0" indent="0" algn="l">
               <a:buNone/>
             </a:pPr>
             <a:r>
@@ -4562,6 +4468,13 @@
             <a:prstDash val="solid"/>
           </a:ln>
         </p:spPr>
+        <p:txBody>
+          <a:bodyPr/>
+          <a:lstStyle/>
+          <a:p>
+            <a:endParaRPr lang="fr-CM"/>
+          </a:p>
+        </p:txBody>
       </p:sp>
       <p:sp>
         <p:nvSpPr>
@@ -4586,7 +4499,7 @@
           </a:bodyPr>
           <a:lstStyle/>
           <a:p>
-            <a:pPr algn="l" indent="0" marL="0">
+            <a:pPr marL="0" indent="0" algn="l">
               <a:buNone/>
             </a:pPr>
             <a:r>
@@ -4624,7 +4537,7 @@
           </a:bodyPr>
           <a:lstStyle/>
           <a:p>
-            <a:pPr algn="l" indent="0" marL="0">
+            <a:pPr marL="0" indent="0" algn="l">
               <a:buNone/>
             </a:pPr>
             <a:r>
@@ -4667,6 +4580,13 @@
             <a:prstDash val="solid"/>
           </a:ln>
         </p:spPr>
+        <p:txBody>
+          <a:bodyPr/>
+          <a:lstStyle/>
+          <a:p>
+            <a:endParaRPr lang="fr-CM"/>
+          </a:p>
+        </p:txBody>
       </p:sp>
       <p:sp>
         <p:nvSpPr>
@@ -4691,7 +4611,7 @@
           </a:bodyPr>
           <a:lstStyle/>
           <a:p>
-            <a:pPr algn="l" indent="0" marL="0">
+            <a:pPr marL="0" indent="0" algn="l">
               <a:buNone/>
             </a:pPr>
             <a:r>
@@ -4729,7 +4649,7 @@
           </a:bodyPr>
           <a:lstStyle/>
           <a:p>
-            <a:pPr algn="l" indent="0" marL="0">
+            <a:pPr marL="0" indent="0" algn="l">
               <a:buNone/>
             </a:pPr>
             <a:r>
@@ -4772,6 +4692,13 @@
             <a:prstDash val="solid"/>
           </a:ln>
         </p:spPr>
+        <p:txBody>
+          <a:bodyPr/>
+          <a:lstStyle/>
+          <a:p>
+            <a:endParaRPr lang="fr-CM"/>
+          </a:p>
+        </p:txBody>
       </p:sp>
       <p:sp>
         <p:nvSpPr>
@@ -4796,7 +4723,7 @@
           </a:bodyPr>
           <a:lstStyle/>
           <a:p>
-            <a:pPr algn="l" indent="0" marL="0">
+            <a:pPr marL="0" indent="0" algn="l">
               <a:buNone/>
             </a:pPr>
             <a:r>
@@ -4834,7 +4761,7 @@
           </a:bodyPr>
           <a:lstStyle/>
           <a:p>
-            <a:pPr algn="l" indent="0" marL="0">
+            <a:pPr marL="0" indent="0" algn="l">
               <a:buNone/>
             </a:pPr>
             <a:r>
@@ -4877,6 +4804,13 @@
             <a:prstDash val="solid"/>
           </a:ln>
         </p:spPr>
+        <p:txBody>
+          <a:bodyPr/>
+          <a:lstStyle/>
+          <a:p>
+            <a:endParaRPr lang="fr-CM"/>
+          </a:p>
+        </p:txBody>
       </p:sp>
       <p:sp>
         <p:nvSpPr>
@@ -4901,7 +4835,7 @@
           </a:bodyPr>
           <a:lstStyle/>
           <a:p>
-            <a:pPr algn="l" indent="0" marL="0">
+            <a:pPr marL="0" indent="0" algn="l">
               <a:buNone/>
             </a:pPr>
             <a:r>
@@ -4939,7 +4873,7 @@
           </a:bodyPr>
           <a:lstStyle/>
           <a:p>
-            <a:pPr algn="l" indent="0" marL="0">
+            <a:pPr marL="0" indent="0" algn="l">
               <a:buNone/>
             </a:pPr>
             <a:r>
@@ -4977,7 +4911,7 @@
           </a:bodyPr>
           <a:lstStyle/>
           <a:p>
-            <a:pPr algn="l" indent="0" marL="0">
+            <a:pPr marL="0" indent="0" algn="l">
               <a:buNone/>
             </a:pPr>
             <a:r>
@@ -5045,6 +4979,13 @@
             <a:prstDash val="solid"/>
           </a:ln>
         </p:spPr>
+        <p:txBody>
+          <a:bodyPr/>
+          <a:lstStyle/>
+          <a:p>
+            <a:endParaRPr lang="fr-CM"/>
+          </a:p>
+        </p:txBody>
       </p:sp>
       <p:sp>
         <p:nvSpPr>
@@ -5074,6 +5015,13 @@
             <a:prstDash val="solid"/>
           </a:ln>
         </p:spPr>
+        <p:txBody>
+          <a:bodyPr/>
+          <a:lstStyle/>
+          <a:p>
+            <a:endParaRPr lang="fr-CM"/>
+          </a:p>
+        </p:txBody>
       </p:sp>
       <p:sp>
         <p:nvSpPr>
@@ -5098,7 +5046,7 @@
           </a:bodyPr>
           <a:lstStyle/>
           <a:p>
-            <a:pPr algn="l" indent="0" marL="0">
+            <a:pPr marL="0" indent="0" algn="l">
               <a:buNone/>
             </a:pPr>
             <a:r>
@@ -5136,7 +5084,7 @@
           </a:bodyPr>
           <a:lstStyle/>
           <a:p>
-            <a:pPr algn="l" indent="0" marL="0">
+            <a:pPr marL="0" indent="0" algn="l">
               <a:buNone/>
             </a:pPr>
             <a:r>
@@ -5179,6 +5127,13 @@
             <a:prstDash val="solid"/>
           </a:ln>
         </p:spPr>
+        <p:txBody>
+          <a:bodyPr/>
+          <a:lstStyle/>
+          <a:p>
+            <a:endParaRPr lang="fr-CM"/>
+          </a:p>
+        </p:txBody>
       </p:sp>
       <p:sp>
         <p:nvSpPr>
@@ -5203,7 +5158,7 @@
           </a:bodyPr>
           <a:lstStyle/>
           <a:p>
-            <a:pPr algn="l" indent="0" marL="0">
+            <a:pPr marL="0" indent="0" algn="l">
               <a:buNone/>
             </a:pPr>
             <a:r>
@@ -5241,7 +5196,7 @@
           </a:bodyPr>
           <a:lstStyle/>
           <a:p>
-            <a:pPr algn="l" indent="0" marL="0">
+            <a:pPr marL="0" indent="0" algn="l">
               <a:buNone/>
             </a:pPr>
             <a:r>
@@ -5284,6 +5239,13 @@
             <a:prstDash val="solid"/>
           </a:ln>
         </p:spPr>
+        <p:txBody>
+          <a:bodyPr/>
+          <a:lstStyle/>
+          <a:p>
+            <a:endParaRPr lang="fr-CM"/>
+          </a:p>
+        </p:txBody>
       </p:sp>
       <p:sp>
         <p:nvSpPr>
@@ -5308,7 +5270,7 @@
           </a:bodyPr>
           <a:lstStyle/>
           <a:p>
-            <a:pPr algn="l" indent="0" marL="0">
+            <a:pPr marL="0" indent="0" algn="l">
               <a:buNone/>
             </a:pPr>
             <a:r>
@@ -5346,7 +5308,7 @@
           </a:bodyPr>
           <a:lstStyle/>
           <a:p>
-            <a:pPr algn="l" indent="0" marL="0">
+            <a:pPr marL="0" indent="0" algn="l">
               <a:buNone/>
             </a:pPr>
             <a:r>
@@ -5389,6 +5351,13 @@
             <a:prstDash val="solid"/>
           </a:ln>
         </p:spPr>
+        <p:txBody>
+          <a:bodyPr/>
+          <a:lstStyle/>
+          <a:p>
+            <a:endParaRPr lang="fr-CM"/>
+          </a:p>
+        </p:txBody>
       </p:sp>
       <p:sp>
         <p:nvSpPr>
@@ -5413,7 +5382,7 @@
           </a:bodyPr>
           <a:lstStyle/>
           <a:p>
-            <a:pPr algn="l" indent="0" marL="0">
+            <a:pPr marL="0" indent="0" algn="l">
               <a:buNone/>
             </a:pPr>
             <a:r>
@@ -5451,7 +5420,7 @@
           </a:bodyPr>
           <a:lstStyle/>
           <a:p>
-            <a:pPr algn="l" indent="0" marL="0">
+            <a:pPr marL="0" indent="0" algn="l">
               <a:buNone/>
             </a:pPr>
             <a:r>
@@ -5494,6 +5463,13 @@
             <a:prstDash val="solid"/>
           </a:ln>
         </p:spPr>
+        <p:txBody>
+          <a:bodyPr/>
+          <a:lstStyle/>
+          <a:p>
+            <a:endParaRPr lang="fr-CM"/>
+          </a:p>
+        </p:txBody>
       </p:sp>
       <p:sp>
         <p:nvSpPr>
@@ -5518,7 +5494,7 @@
           </a:bodyPr>
           <a:lstStyle/>
           <a:p>
-            <a:pPr algn="l" indent="0" marL="0">
+            <a:pPr marL="0" indent="0" algn="l">
               <a:buNone/>
             </a:pPr>
             <a:r>
@@ -5556,7 +5532,7 @@
           </a:bodyPr>
           <a:lstStyle/>
           <a:p>
-            <a:pPr algn="l" indent="0" marL="0">
+            <a:pPr marL="0" indent="0" algn="l">
               <a:buNone/>
             </a:pPr>
             <a:r>
@@ -5594,7 +5570,7 @@
           </a:bodyPr>
           <a:lstStyle/>
           <a:p>
-            <a:pPr algn="l" indent="0" marL="0">
+            <a:pPr marL="0" indent="0" algn="l">
               <a:buNone/>
             </a:pPr>
             <a:r>
@@ -5662,6 +5638,13 @@
             <a:prstDash val="solid"/>
           </a:ln>
         </p:spPr>
+        <p:txBody>
+          <a:bodyPr/>
+          <a:lstStyle/>
+          <a:p>
+            <a:endParaRPr lang="fr-CM"/>
+          </a:p>
+        </p:txBody>
       </p:sp>
       <p:sp>
         <p:nvSpPr>
@@ -5691,6 +5674,13 @@
             <a:prstDash val="solid"/>
           </a:ln>
         </p:spPr>
+        <p:txBody>
+          <a:bodyPr/>
+          <a:lstStyle/>
+          <a:p>
+            <a:endParaRPr lang="fr-CM"/>
+          </a:p>
+        </p:txBody>
       </p:sp>
       <p:sp>
         <p:nvSpPr>
@@ -5715,7 +5705,7 @@
           </a:bodyPr>
           <a:lstStyle/>
           <a:p>
-            <a:pPr algn="l" indent="0" marL="0">
+            <a:pPr marL="0" indent="0" algn="l">
               <a:buNone/>
             </a:pPr>
             <a:r>
@@ -5753,7 +5743,7 @@
           </a:bodyPr>
           <a:lstStyle/>
           <a:p>
-            <a:pPr algn="l" indent="0" marL="0">
+            <a:pPr marL="0" indent="0" algn="l">
               <a:buNone/>
             </a:pPr>
             <a:r>
@@ -5796,6 +5786,13 @@
             <a:prstDash val="solid"/>
           </a:ln>
         </p:spPr>
+        <p:txBody>
+          <a:bodyPr/>
+          <a:lstStyle/>
+          <a:p>
+            <a:endParaRPr lang="fr-CM"/>
+          </a:p>
+        </p:txBody>
       </p:sp>
       <p:sp>
         <p:nvSpPr>
@@ -5820,7 +5817,7 @@
           </a:bodyPr>
           <a:lstStyle/>
           <a:p>
-            <a:pPr algn="l" indent="0" marL="0">
+            <a:pPr marL="0" indent="0" algn="l">
               <a:buNone/>
             </a:pPr>
             <a:r>
@@ -5858,7 +5855,7 @@
           </a:bodyPr>
           <a:lstStyle/>
           <a:p>
-            <a:pPr algn="l" indent="0" marL="0">
+            <a:pPr marL="0" indent="0" algn="l">
               <a:buNone/>
             </a:pPr>
             <a:r>
@@ -5901,6 +5898,13 @@
             <a:prstDash val="solid"/>
           </a:ln>
         </p:spPr>
+        <p:txBody>
+          <a:bodyPr/>
+          <a:lstStyle/>
+          <a:p>
+            <a:endParaRPr lang="fr-CM"/>
+          </a:p>
+        </p:txBody>
       </p:sp>
       <p:sp>
         <p:nvSpPr>
@@ -5925,7 +5929,7 @@
           </a:bodyPr>
           <a:lstStyle/>
           <a:p>
-            <a:pPr algn="l" indent="0" marL="0">
+            <a:pPr marL="0" indent="0" algn="l">
               <a:buNone/>
             </a:pPr>
             <a:r>
@@ -5963,7 +5967,7 @@
           </a:bodyPr>
           <a:lstStyle/>
           <a:p>
-            <a:pPr algn="l" indent="0" marL="0">
+            <a:pPr marL="0" indent="0" algn="l">
               <a:buNone/>
             </a:pPr>
             <a:r>
@@ -6006,6 +6010,13 @@
             <a:prstDash val="solid"/>
           </a:ln>
         </p:spPr>
+        <p:txBody>
+          <a:bodyPr/>
+          <a:lstStyle/>
+          <a:p>
+            <a:endParaRPr lang="fr-CM"/>
+          </a:p>
+        </p:txBody>
       </p:sp>
       <p:sp>
         <p:nvSpPr>
@@ -6030,7 +6041,7 @@
           </a:bodyPr>
           <a:lstStyle/>
           <a:p>
-            <a:pPr algn="l" indent="0" marL="0">
+            <a:pPr marL="0" indent="0" algn="l">
               <a:buNone/>
             </a:pPr>
             <a:r>
@@ -6068,7 +6079,7 @@
           </a:bodyPr>
           <a:lstStyle/>
           <a:p>
-            <a:pPr algn="l" indent="0" marL="0">
+            <a:pPr marL="0" indent="0" algn="l">
               <a:buNone/>
             </a:pPr>
             <a:r>
@@ -6111,6 +6122,13 @@
             <a:prstDash val="solid"/>
           </a:ln>
         </p:spPr>
+        <p:txBody>
+          <a:bodyPr/>
+          <a:lstStyle/>
+          <a:p>
+            <a:endParaRPr lang="fr-CM"/>
+          </a:p>
+        </p:txBody>
       </p:sp>
       <p:sp>
         <p:nvSpPr>
@@ -6135,7 +6153,7 @@
           </a:bodyPr>
           <a:lstStyle/>
           <a:p>
-            <a:pPr algn="l" indent="0" marL="0">
+            <a:pPr marL="0" indent="0" algn="l">
               <a:buNone/>
             </a:pPr>
             <a:r>
@@ -6173,7 +6191,7 @@
           </a:bodyPr>
           <a:lstStyle/>
           <a:p>
-            <a:pPr algn="l" indent="0" marL="0">
+            <a:pPr marL="0" indent="0" algn="l">
               <a:buNone/>
             </a:pPr>
             <a:r>
@@ -6211,7 +6229,7 @@
           </a:bodyPr>
           <a:lstStyle/>
           <a:p>
-            <a:pPr algn="l" indent="0" marL="0">
+            <a:pPr marL="0" indent="0" algn="l">
               <a:buNone/>
             </a:pPr>
             <a:r>
@@ -6279,6 +6297,13 @@
             <a:prstDash val="solid"/>
           </a:ln>
         </p:spPr>
+        <p:txBody>
+          <a:bodyPr/>
+          <a:lstStyle/>
+          <a:p>
+            <a:endParaRPr lang="fr-CM"/>
+          </a:p>
+        </p:txBody>
       </p:sp>
       <p:sp>
         <p:nvSpPr>
@@ -6308,6 +6333,13 @@
             <a:prstDash val="solid"/>
           </a:ln>
         </p:spPr>
+        <p:txBody>
+          <a:bodyPr/>
+          <a:lstStyle/>
+          <a:p>
+            <a:endParaRPr lang="fr-CM"/>
+          </a:p>
+        </p:txBody>
       </p:sp>
       <p:sp>
         <p:nvSpPr>
@@ -6332,7 +6364,7 @@
           </a:bodyPr>
           <a:lstStyle/>
           <a:p>
-            <a:pPr algn="l" indent="0" marL="0">
+            <a:pPr marL="0" indent="0" algn="l">
               <a:buNone/>
             </a:pPr>
             <a:r>
@@ -6370,7 +6402,7 @@
           </a:bodyPr>
           <a:lstStyle/>
           <a:p>
-            <a:pPr algn="l" indent="0" marL="0">
+            <a:pPr marL="0" indent="0" algn="l">
               <a:buNone/>
             </a:pPr>
             <a:r>
@@ -6413,6 +6445,13 @@
             <a:prstDash val="solid"/>
           </a:ln>
         </p:spPr>
+        <p:txBody>
+          <a:bodyPr/>
+          <a:lstStyle/>
+          <a:p>
+            <a:endParaRPr lang="fr-CM"/>
+          </a:p>
+        </p:txBody>
       </p:sp>
       <p:sp>
         <p:nvSpPr>
@@ -6437,7 +6476,7 @@
           </a:bodyPr>
           <a:lstStyle/>
           <a:p>
-            <a:pPr algn="l" indent="0" marL="0">
+            <a:pPr marL="0" indent="0" algn="l">
               <a:buNone/>
             </a:pPr>
             <a:r>
@@ -6475,7 +6514,7 @@
           </a:bodyPr>
           <a:lstStyle/>
           <a:p>
-            <a:pPr algn="l" indent="0" marL="0">
+            <a:pPr marL="0" indent="0" algn="l">
               <a:buNone/>
             </a:pPr>
             <a:r>
@@ -6518,6 +6557,13 @@
             <a:prstDash val="solid"/>
           </a:ln>
         </p:spPr>
+        <p:txBody>
+          <a:bodyPr/>
+          <a:lstStyle/>
+          <a:p>
+            <a:endParaRPr lang="fr-CM"/>
+          </a:p>
+        </p:txBody>
       </p:sp>
       <p:sp>
         <p:nvSpPr>
@@ -6542,7 +6588,7 @@
           </a:bodyPr>
           <a:lstStyle/>
           <a:p>
-            <a:pPr algn="l" indent="0" marL="0">
+            <a:pPr marL="0" indent="0" algn="l">
               <a:buNone/>
             </a:pPr>
             <a:r>
@@ -6580,7 +6626,7 @@
           </a:bodyPr>
           <a:lstStyle/>
           <a:p>
-            <a:pPr algn="l" indent="0" marL="0">
+            <a:pPr marL="0" indent="0" algn="l">
               <a:buNone/>
             </a:pPr>
             <a:r>
@@ -6623,6 +6669,13 @@
             <a:prstDash val="solid"/>
           </a:ln>
         </p:spPr>
+        <p:txBody>
+          <a:bodyPr/>
+          <a:lstStyle/>
+          <a:p>
+            <a:endParaRPr lang="fr-CM"/>
+          </a:p>
+        </p:txBody>
       </p:sp>
       <p:sp>
         <p:nvSpPr>
@@ -6647,7 +6700,7 @@
           </a:bodyPr>
           <a:lstStyle/>
           <a:p>
-            <a:pPr algn="l" indent="0" marL="0">
+            <a:pPr marL="0" indent="0" algn="l">
               <a:buNone/>
             </a:pPr>
             <a:r>
@@ -6685,7 +6738,7 @@
           </a:bodyPr>
           <a:lstStyle/>
           <a:p>
-            <a:pPr algn="l" indent="0" marL="0">
+            <a:pPr marL="0" indent="0" algn="l">
               <a:buNone/>
             </a:pPr>
             <a:r>
@@ -6728,6 +6781,13 @@
             <a:prstDash val="solid"/>
           </a:ln>
         </p:spPr>
+        <p:txBody>
+          <a:bodyPr/>
+          <a:lstStyle/>
+          <a:p>
+            <a:endParaRPr lang="fr-CM"/>
+          </a:p>
+        </p:txBody>
       </p:sp>
       <p:sp>
         <p:nvSpPr>
@@ -6752,7 +6812,7 @@
           </a:bodyPr>
           <a:lstStyle/>
           <a:p>
-            <a:pPr algn="l" indent="0" marL="0">
+            <a:pPr marL="0" indent="0" algn="l">
               <a:buNone/>
             </a:pPr>
             <a:r>
@@ -6790,7 +6850,7 @@
           </a:bodyPr>
           <a:lstStyle/>
           <a:p>
-            <a:pPr algn="l" indent="0" marL="0">
+            <a:pPr marL="0" indent="0" algn="l">
               <a:buNone/>
             </a:pPr>
             <a:r>
@@ -6828,7 +6888,7 @@
           </a:bodyPr>
           <a:lstStyle/>
           <a:p>
-            <a:pPr algn="l" indent="0" marL="0">
+            <a:pPr marL="0" indent="0" algn="l">
               <a:buNone/>
             </a:pPr>
             <a:r>
@@ -6896,6 +6956,13 @@
             <a:prstDash val="solid"/>
           </a:ln>
         </p:spPr>
+        <p:txBody>
+          <a:bodyPr/>
+          <a:lstStyle/>
+          <a:p>
+            <a:endParaRPr lang="fr-CM"/>
+          </a:p>
+        </p:txBody>
       </p:sp>
       <p:sp>
         <p:nvSpPr>
@@ -6925,6 +6992,13 @@
             <a:prstDash val="solid"/>
           </a:ln>
         </p:spPr>
+        <p:txBody>
+          <a:bodyPr/>
+          <a:lstStyle/>
+          <a:p>
+            <a:endParaRPr lang="fr-CM"/>
+          </a:p>
+        </p:txBody>
       </p:sp>
       <p:sp>
         <p:nvSpPr>
@@ -6949,7 +7023,7 @@
           </a:bodyPr>
           <a:lstStyle/>
           <a:p>
-            <a:pPr algn="l" indent="0" marL="0">
+            <a:pPr marL="0" indent="0" algn="l">
               <a:buNone/>
             </a:pPr>
             <a:r>
@@ -6987,7 +7061,7 @@
           </a:bodyPr>
           <a:lstStyle/>
           <a:p>
-            <a:pPr algn="l" indent="0" marL="0">
+            <a:pPr marL="0" indent="0" algn="l">
               <a:buNone/>
             </a:pPr>
             <a:r>
@@ -7030,6 +7104,13 @@
             <a:prstDash val="solid"/>
           </a:ln>
         </p:spPr>
+        <p:txBody>
+          <a:bodyPr/>
+          <a:lstStyle/>
+          <a:p>
+            <a:endParaRPr lang="fr-CM"/>
+          </a:p>
+        </p:txBody>
       </p:sp>
       <p:sp>
         <p:nvSpPr>
@@ -7054,7 +7135,7 @@
           </a:bodyPr>
           <a:lstStyle/>
           <a:p>
-            <a:pPr algn="l" indent="0" marL="0">
+            <a:pPr marL="0" indent="0" algn="l">
               <a:buNone/>
             </a:pPr>
             <a:r>
@@ -7092,7 +7173,7 @@
           </a:bodyPr>
           <a:lstStyle/>
           <a:p>
-            <a:pPr algn="l" indent="0" marL="0">
+            <a:pPr marL="0" indent="0" algn="l">
               <a:buNone/>
             </a:pPr>
             <a:r>
@@ -7135,6 +7216,13 @@
             <a:prstDash val="solid"/>
           </a:ln>
         </p:spPr>
+        <p:txBody>
+          <a:bodyPr/>
+          <a:lstStyle/>
+          <a:p>
+            <a:endParaRPr lang="fr-CM"/>
+          </a:p>
+        </p:txBody>
       </p:sp>
       <p:sp>
         <p:nvSpPr>
@@ -7159,7 +7247,7 @@
           </a:bodyPr>
           <a:lstStyle/>
           <a:p>
-            <a:pPr algn="l" indent="0" marL="0">
+            <a:pPr marL="0" indent="0" algn="l">
               <a:buNone/>
             </a:pPr>
             <a:r>
@@ -7197,7 +7285,7 @@
           </a:bodyPr>
           <a:lstStyle/>
           <a:p>
-            <a:pPr algn="l" indent="0" marL="0">
+            <a:pPr marL="0" indent="0" algn="l">
               <a:buNone/>
             </a:pPr>
             <a:r>
@@ -7240,6 +7328,13 @@
             <a:prstDash val="solid"/>
           </a:ln>
         </p:spPr>
+        <p:txBody>
+          <a:bodyPr/>
+          <a:lstStyle/>
+          <a:p>
+            <a:endParaRPr lang="fr-CM"/>
+          </a:p>
+        </p:txBody>
       </p:sp>
       <p:sp>
         <p:nvSpPr>
@@ -7264,7 +7359,7 @@
           </a:bodyPr>
           <a:lstStyle/>
           <a:p>
-            <a:pPr algn="l" indent="0" marL="0">
+            <a:pPr marL="0" indent="0" algn="l">
               <a:buNone/>
             </a:pPr>
             <a:r>
@@ -7302,7 +7397,7 @@
           </a:bodyPr>
           <a:lstStyle/>
           <a:p>
-            <a:pPr algn="l" indent="0" marL="0">
+            <a:pPr marL="0" indent="0" algn="l">
               <a:buNone/>
             </a:pPr>
             <a:r>
@@ -7345,6 +7440,13 @@
             <a:prstDash val="solid"/>
           </a:ln>
         </p:spPr>
+        <p:txBody>
+          <a:bodyPr/>
+          <a:lstStyle/>
+          <a:p>
+            <a:endParaRPr lang="fr-CM"/>
+          </a:p>
+        </p:txBody>
       </p:sp>
       <p:sp>
         <p:nvSpPr>
@@ -7369,7 +7471,7 @@
           </a:bodyPr>
           <a:lstStyle/>
           <a:p>
-            <a:pPr algn="l" indent="0" marL="0">
+            <a:pPr marL="0" indent="0" algn="l">
               <a:buNone/>
             </a:pPr>
             <a:r>
@@ -7407,7 +7509,7 @@
           </a:bodyPr>
           <a:lstStyle/>
           <a:p>
-            <a:pPr algn="l" indent="0" marL="0">
+            <a:pPr marL="0" indent="0" algn="l">
               <a:buNone/>
             </a:pPr>
             <a:r>
@@ -7445,7 +7547,7 @@
           </a:bodyPr>
           <a:lstStyle/>
           <a:p>
-            <a:pPr algn="l" indent="0" marL="0">
+            <a:pPr marL="0" indent="0" algn="l">
               <a:buNone/>
             </a:pPr>
             <a:r>
@@ -7513,6 +7615,13 @@
             <a:prstDash val="solid"/>
           </a:ln>
         </p:spPr>
+        <p:txBody>
+          <a:bodyPr/>
+          <a:lstStyle/>
+          <a:p>
+            <a:endParaRPr lang="fr-CM"/>
+          </a:p>
+        </p:txBody>
       </p:sp>
       <p:sp>
         <p:nvSpPr>
@@ -7542,6 +7651,13 @@
             <a:prstDash val="solid"/>
           </a:ln>
         </p:spPr>
+        <p:txBody>
+          <a:bodyPr/>
+          <a:lstStyle/>
+          <a:p>
+            <a:endParaRPr lang="fr-CM"/>
+          </a:p>
+        </p:txBody>
       </p:sp>
       <p:sp>
         <p:nvSpPr>
@@ -7566,7 +7682,7 @@
           </a:bodyPr>
           <a:lstStyle/>
           <a:p>
-            <a:pPr algn="l" indent="0" marL="0">
+            <a:pPr marL="0" indent="0" algn="l">
               <a:buNone/>
             </a:pPr>
             <a:r>
@@ -7604,7 +7720,7 @@
           </a:bodyPr>
           <a:lstStyle/>
           <a:p>
-            <a:pPr algn="l" indent="0" marL="0">
+            <a:pPr marL="0" indent="0" algn="l">
               <a:buNone/>
             </a:pPr>
             <a:r>
@@ -7647,6 +7763,13 @@
             <a:prstDash val="solid"/>
           </a:ln>
         </p:spPr>
+        <p:txBody>
+          <a:bodyPr/>
+          <a:lstStyle/>
+          <a:p>
+            <a:endParaRPr lang="fr-CM"/>
+          </a:p>
+        </p:txBody>
       </p:sp>
       <p:sp>
         <p:nvSpPr>
@@ -7671,7 +7794,7 @@
           </a:bodyPr>
           <a:lstStyle/>
           <a:p>
-            <a:pPr algn="l" indent="0" marL="0">
+            <a:pPr marL="0" indent="0" algn="l">
               <a:buNone/>
             </a:pPr>
             <a:r>
@@ -7709,7 +7832,7 @@
           </a:bodyPr>
           <a:lstStyle/>
           <a:p>
-            <a:pPr algn="l" indent="0" marL="0">
+            <a:pPr marL="0" indent="0" algn="l">
               <a:buNone/>
             </a:pPr>
             <a:r>
@@ -7752,6 +7875,13 @@
             <a:prstDash val="solid"/>
           </a:ln>
         </p:spPr>
+        <p:txBody>
+          <a:bodyPr/>
+          <a:lstStyle/>
+          <a:p>
+            <a:endParaRPr lang="fr-CM"/>
+          </a:p>
+        </p:txBody>
       </p:sp>
       <p:sp>
         <p:nvSpPr>
@@ -7776,7 +7906,7 @@
           </a:bodyPr>
           <a:lstStyle/>
           <a:p>
-            <a:pPr algn="l" indent="0" marL="0">
+            <a:pPr marL="0" indent="0" algn="l">
               <a:buNone/>
             </a:pPr>
             <a:r>
@@ -7814,7 +7944,7 @@
           </a:bodyPr>
           <a:lstStyle/>
           <a:p>
-            <a:pPr algn="l" indent="0" marL="0">
+            <a:pPr marL="0" indent="0" algn="l">
               <a:buNone/>
             </a:pPr>
             <a:r>
@@ -7857,6 +7987,13 @@
             <a:prstDash val="solid"/>
           </a:ln>
         </p:spPr>
+        <p:txBody>
+          <a:bodyPr/>
+          <a:lstStyle/>
+          <a:p>
+            <a:endParaRPr lang="fr-CM"/>
+          </a:p>
+        </p:txBody>
       </p:sp>
       <p:sp>
         <p:nvSpPr>
@@ -7881,7 +8018,7 @@
           </a:bodyPr>
           <a:lstStyle/>
           <a:p>
-            <a:pPr algn="l" indent="0" marL="0">
+            <a:pPr marL="0" indent="0" algn="l">
               <a:buNone/>
             </a:pPr>
             <a:r>
@@ -7919,7 +8056,7 @@
           </a:bodyPr>
           <a:lstStyle/>
           <a:p>
-            <a:pPr algn="l" indent="0" marL="0">
+            <a:pPr marL="0" indent="0" algn="l">
               <a:buNone/>
             </a:pPr>
             <a:r>
@@ -7962,6 +8099,13 @@
             <a:prstDash val="solid"/>
           </a:ln>
         </p:spPr>
+        <p:txBody>
+          <a:bodyPr/>
+          <a:lstStyle/>
+          <a:p>
+            <a:endParaRPr lang="fr-CM"/>
+          </a:p>
+        </p:txBody>
       </p:sp>
       <p:sp>
         <p:nvSpPr>
@@ -7986,7 +8130,7 @@
           </a:bodyPr>
           <a:lstStyle/>
           <a:p>
-            <a:pPr algn="l" indent="0" marL="0">
+            <a:pPr marL="0" indent="0" algn="l">
               <a:buNone/>
             </a:pPr>
             <a:r>
@@ -8024,7 +8168,7 @@
           </a:bodyPr>
           <a:lstStyle/>
           <a:p>
-            <a:pPr algn="l" indent="0" marL="0">
+            <a:pPr marL="0" indent="0" algn="l">
               <a:buNone/>
             </a:pPr>
             <a:r>
@@ -8067,6 +8211,13 @@
             <a:prstDash val="solid"/>
           </a:ln>
         </p:spPr>
+        <p:txBody>
+          <a:bodyPr/>
+          <a:lstStyle/>
+          <a:p>
+            <a:endParaRPr lang="fr-CM"/>
+          </a:p>
+        </p:txBody>
       </p:sp>
       <p:sp>
         <p:nvSpPr>
@@ -8091,7 +8242,7 @@
           </a:bodyPr>
           <a:lstStyle/>
           <a:p>
-            <a:pPr algn="l" indent="0" marL="0">
+            <a:pPr marL="0" indent="0" algn="l">
               <a:buNone/>
             </a:pPr>
             <a:r>
@@ -8129,7 +8280,7 @@
           </a:bodyPr>
           <a:lstStyle/>
           <a:p>
-            <a:pPr algn="l" indent="0" marL="0">
+            <a:pPr marL="0" indent="0" algn="l">
               <a:buNone/>
             </a:pPr>
             <a:r>
@@ -8172,6 +8323,13 @@
             <a:prstDash val="solid"/>
           </a:ln>
         </p:spPr>
+        <p:txBody>
+          <a:bodyPr/>
+          <a:lstStyle/>
+          <a:p>
+            <a:endParaRPr lang="fr-CM"/>
+          </a:p>
+        </p:txBody>
       </p:sp>
       <p:sp>
         <p:nvSpPr>
@@ -8196,7 +8354,7 @@
           </a:bodyPr>
           <a:lstStyle/>
           <a:p>
-            <a:pPr algn="l" indent="0" marL="0">
+            <a:pPr marL="0" indent="0" algn="l">
               <a:buNone/>
             </a:pPr>
             <a:r>
@@ -8234,7 +8392,7 @@
           </a:bodyPr>
           <a:lstStyle/>
           <a:p>
-            <a:pPr algn="l" indent="0" marL="0">
+            <a:pPr marL="0" indent="0" algn="l">
               <a:buNone/>
             </a:pPr>
             <a:r>
@@ -8272,7 +8430,7 @@
           </a:bodyPr>
           <a:lstStyle/>
           <a:p>
-            <a:pPr algn="l" indent="0" marL="0">
+            <a:pPr marL="0" indent="0" algn="l">
               <a:buNone/>
             </a:pPr>
             <a:r>
@@ -8340,6 +8498,13 @@
             <a:prstDash val="solid"/>
           </a:ln>
         </p:spPr>
+        <p:txBody>
+          <a:bodyPr/>
+          <a:lstStyle/>
+          <a:p>
+            <a:endParaRPr lang="fr-CM"/>
+          </a:p>
+        </p:txBody>
       </p:sp>
       <p:sp>
         <p:nvSpPr>
@@ -8369,6 +8534,13 @@
             <a:prstDash val="solid"/>
           </a:ln>
         </p:spPr>
+        <p:txBody>
+          <a:bodyPr/>
+          <a:lstStyle/>
+          <a:p>
+            <a:endParaRPr lang="fr-CM"/>
+          </a:p>
+        </p:txBody>
       </p:sp>
       <p:sp>
         <p:nvSpPr>
@@ -8393,7 +8565,7 @@
           </a:bodyPr>
           <a:lstStyle/>
           <a:p>
-            <a:pPr algn="l" indent="0" marL="0">
+            <a:pPr marL="0" indent="0" algn="l">
               <a:buNone/>
             </a:pPr>
             <a:r>
@@ -8431,7 +8603,7 @@
           </a:bodyPr>
           <a:lstStyle/>
           <a:p>
-            <a:pPr algn="l" indent="0" marL="0">
+            <a:pPr marL="0" indent="0" algn="l">
               <a:buNone/>
             </a:pPr>
             <a:r>
@@ -8474,6 +8646,13 @@
             <a:prstDash val="solid"/>
           </a:ln>
         </p:spPr>
+        <p:txBody>
+          <a:bodyPr/>
+          <a:lstStyle/>
+          <a:p>
+            <a:endParaRPr lang="fr-CM"/>
+          </a:p>
+        </p:txBody>
       </p:sp>
       <p:sp>
         <p:nvSpPr>
@@ -8498,7 +8677,7 @@
           </a:bodyPr>
           <a:lstStyle/>
           <a:p>
-            <a:pPr algn="l" indent="0" marL="0">
+            <a:pPr marL="0" indent="0" algn="l">
               <a:buNone/>
             </a:pPr>
             <a:r>
@@ -8536,7 +8715,7 @@
           </a:bodyPr>
           <a:lstStyle/>
           <a:p>
-            <a:pPr algn="l" indent="0" marL="0">
+            <a:pPr marL="0" indent="0" algn="l">
               <a:buNone/>
             </a:pPr>
             <a:r>
@@ -8579,6 +8758,13 @@
             <a:prstDash val="solid"/>
           </a:ln>
         </p:spPr>
+        <p:txBody>
+          <a:bodyPr/>
+          <a:lstStyle/>
+          <a:p>
+            <a:endParaRPr lang="fr-CM"/>
+          </a:p>
+        </p:txBody>
       </p:sp>
       <p:sp>
         <p:nvSpPr>
@@ -8603,7 +8789,7 @@
           </a:bodyPr>
           <a:lstStyle/>
           <a:p>
-            <a:pPr algn="l" indent="0" marL="0">
+            <a:pPr marL="0" indent="0" algn="l">
               <a:buNone/>
             </a:pPr>
             <a:r>
@@ -8641,7 +8827,7 @@
           </a:bodyPr>
           <a:lstStyle/>
           <a:p>
-            <a:pPr algn="l" indent="0" marL="0">
+            <a:pPr marL="0" indent="0" algn="l">
               <a:buNone/>
             </a:pPr>
             <a:r>
@@ -8684,6 +8870,13 @@
             <a:prstDash val="solid"/>
           </a:ln>
         </p:spPr>
+        <p:txBody>
+          <a:bodyPr/>
+          <a:lstStyle/>
+          <a:p>
+            <a:endParaRPr lang="fr-CM"/>
+          </a:p>
+        </p:txBody>
       </p:sp>
       <p:sp>
         <p:nvSpPr>
@@ -8708,7 +8901,7 @@
           </a:bodyPr>
           <a:lstStyle/>
           <a:p>
-            <a:pPr algn="l" indent="0" marL="0">
+            <a:pPr marL="0" indent="0" algn="l">
               <a:buNone/>
             </a:pPr>
             <a:r>
@@ -8746,7 +8939,7 @@
           </a:bodyPr>
           <a:lstStyle/>
           <a:p>
-            <a:pPr algn="l" indent="0" marL="0">
+            <a:pPr marL="0" indent="0" algn="l">
               <a:buNone/>
             </a:pPr>
             <a:r>
@@ -8789,6 +8982,13 @@
             <a:prstDash val="solid"/>
           </a:ln>
         </p:spPr>
+        <p:txBody>
+          <a:bodyPr/>
+          <a:lstStyle/>
+          <a:p>
+            <a:endParaRPr lang="fr-CM"/>
+          </a:p>
+        </p:txBody>
       </p:sp>
       <p:sp>
         <p:nvSpPr>
@@ -8813,7 +9013,7 @@
           </a:bodyPr>
           <a:lstStyle/>
           <a:p>
-            <a:pPr algn="l" indent="0" marL="0">
+            <a:pPr marL="0" indent="0" algn="l">
               <a:buNone/>
             </a:pPr>
             <a:r>
@@ -8851,7 +9051,7 @@
           </a:bodyPr>
           <a:lstStyle/>
           <a:p>
-            <a:pPr algn="l" indent="0" marL="0">
+            <a:pPr marL="0" indent="0" algn="l">
               <a:buNone/>
             </a:pPr>
             <a:r>
@@ -8894,6 +9094,13 @@
             <a:prstDash val="solid"/>
           </a:ln>
         </p:spPr>
+        <p:txBody>
+          <a:bodyPr/>
+          <a:lstStyle/>
+          <a:p>
+            <a:endParaRPr lang="fr-CM"/>
+          </a:p>
+        </p:txBody>
       </p:sp>
       <p:sp>
         <p:nvSpPr>
@@ -8918,7 +9125,7 @@
           </a:bodyPr>
           <a:lstStyle/>
           <a:p>
-            <a:pPr algn="l" indent="0" marL="0">
+            <a:pPr marL="0" indent="0" algn="l">
               <a:buNone/>
             </a:pPr>
             <a:r>
@@ -8956,7 +9163,7 @@
           </a:bodyPr>
           <a:lstStyle/>
           <a:p>
-            <a:pPr algn="l" indent="0" marL="0">
+            <a:pPr marL="0" indent="0" algn="l">
               <a:buNone/>
             </a:pPr>
             <a:r>
@@ -8999,6 +9206,13 @@
             <a:prstDash val="solid"/>
           </a:ln>
         </p:spPr>
+        <p:txBody>
+          <a:bodyPr/>
+          <a:lstStyle/>
+          <a:p>
+            <a:endParaRPr lang="fr-CM"/>
+          </a:p>
+        </p:txBody>
       </p:sp>
       <p:sp>
         <p:nvSpPr>
@@ -9023,7 +9237,7 @@
           </a:bodyPr>
           <a:lstStyle/>
           <a:p>
-            <a:pPr algn="l" indent="0" marL="0">
+            <a:pPr marL="0" indent="0" algn="l">
               <a:buNone/>
             </a:pPr>
             <a:r>
@@ -9061,7 +9275,7 @@
           </a:bodyPr>
           <a:lstStyle/>
           <a:p>
-            <a:pPr algn="l" indent="0" marL="0">
+            <a:pPr marL="0" indent="0" algn="l">
               <a:buNone/>
             </a:pPr>
             <a:r>
@@ -9099,7 +9313,7 @@
           </a:bodyPr>
           <a:lstStyle/>
           <a:p>
-            <a:pPr algn="l" indent="0" marL="0">
+            <a:pPr marL="0" indent="0" algn="l">
               <a:buNone/>
             </a:pPr>
             <a:r>
@@ -9415,4 +9629,319 @@
     </a:ext>
   </a:extLst>
 </a:theme>
+</file>
+
+<file path=ppt/theme/theme2.xml><?xml version="1.0" encoding="utf-8"?>
+<a:theme xmlns:a="http://schemas.openxmlformats.org/drawingml/2006/main" name="Thème Office">
+  <a:themeElements>
+    <a:clrScheme name="Office">
+      <a:dk1>
+        <a:sysClr val="windowText" lastClr="000000"/>
+      </a:dk1>
+      <a:lt1>
+        <a:sysClr val="window" lastClr="FFFFFF"/>
+      </a:lt1>
+      <a:dk2>
+        <a:srgbClr val="0E2841"/>
+      </a:dk2>
+      <a:lt2>
+        <a:srgbClr val="E8E8E8"/>
+      </a:lt2>
+      <a:accent1>
+        <a:srgbClr val="156082"/>
+      </a:accent1>
+      <a:accent2>
+        <a:srgbClr val="E97132"/>
+      </a:accent2>
+      <a:accent3>
+        <a:srgbClr val="196B24"/>
+      </a:accent3>
+      <a:accent4>
+        <a:srgbClr val="0F9ED5"/>
+      </a:accent4>
+      <a:accent5>
+        <a:srgbClr val="A02B93"/>
+      </a:accent5>
+      <a:accent6>
+        <a:srgbClr val="4EA72E"/>
+      </a:accent6>
+      <a:hlink>
+        <a:srgbClr val="467886"/>
+      </a:hlink>
+      <a:folHlink>
+        <a:srgbClr val="96607D"/>
+      </a:folHlink>
+    </a:clrScheme>
+    <a:fontScheme name="Office">
+      <a:majorFont>
+        <a:latin typeface="Aptos Display" panose="02110004020202020204"/>
+        <a:ea typeface=""/>
+        <a:cs typeface=""/>
+        <a:font script="Jpan" typeface="游ゴシック Light"/>
+        <a:font script="Hang" typeface="맑은 고딕"/>
+        <a:font script="Hans" typeface="等线 Light"/>
+        <a:font script="Hant" typeface="新細明體"/>
+        <a:font script="Arab" typeface="Times New Roman"/>
+        <a:font script="Hebr" typeface="Times New Roman"/>
+        <a:font script="Thai" typeface="Angsana New"/>
+        <a:font script="Ethi" typeface="Nyala"/>
+        <a:font script="Beng" typeface="Vrinda"/>
+        <a:font script="Gujr" typeface="Shruti"/>
+        <a:font script="Khmr" typeface="MoolBoran"/>
+        <a:font script="Knda" typeface="Tunga"/>
+        <a:font script="Guru" typeface="Raavi"/>
+        <a:font script="Cans" typeface="Euphemia"/>
+        <a:font script="Cher" typeface="Plantagenet Cherokee"/>
+        <a:font script="Yiii" typeface="Microsoft Yi Baiti"/>
+        <a:font script="Tibt" typeface="Microsoft Himalaya"/>
+        <a:font script="Thaa" typeface="MV Boli"/>
+        <a:font script="Deva" typeface="Mangal"/>
+        <a:font script="Telu" typeface="Gautami"/>
+        <a:font script="Taml" typeface="Latha"/>
+        <a:font script="Syrc" typeface="Estrangelo Edessa"/>
+        <a:font script="Orya" typeface="Kalinga"/>
+        <a:font script="Mlym" typeface="Kartika"/>
+        <a:font script="Laoo" typeface="DokChampa"/>
+        <a:font script="Sinh" typeface="Iskoola Pota"/>
+        <a:font script="Mong" typeface="Mongolian Baiti"/>
+        <a:font script="Viet" typeface="Times New Roman"/>
+        <a:font script="Uigh" typeface="Microsoft Uighur"/>
+        <a:font script="Geor" typeface="Sylfaen"/>
+        <a:font script="Armn" typeface="Arial"/>
+        <a:font script="Bugi" typeface="Leelawadee UI"/>
+        <a:font script="Bopo" typeface="Microsoft JhengHei"/>
+        <a:font script="Java" typeface="Javanese Text"/>
+        <a:font script="Lisu" typeface="Segoe UI"/>
+        <a:font script="Mymr" typeface="Myanmar Text"/>
+        <a:font script="Nkoo" typeface="Ebrima"/>
+        <a:font script="Olck" typeface="Nirmala UI"/>
+        <a:font script="Osma" typeface="Ebrima"/>
+        <a:font script="Phag" typeface="Phagspa"/>
+        <a:font script="Syrn" typeface="Estrangelo Edessa"/>
+        <a:font script="Syrj" typeface="Estrangelo Edessa"/>
+        <a:font script="Syre" typeface="Estrangelo Edessa"/>
+        <a:font script="Sora" typeface="Nirmala UI"/>
+        <a:font script="Tale" typeface="Microsoft Tai Le"/>
+        <a:font script="Talu" typeface="Microsoft New Tai Lue"/>
+        <a:font script="Tfng" typeface="Ebrima"/>
+      </a:majorFont>
+      <a:minorFont>
+        <a:latin typeface="Aptos" panose="02110004020202020204"/>
+        <a:ea typeface=""/>
+        <a:cs typeface=""/>
+        <a:font script="Jpan" typeface="游ゴシック"/>
+        <a:font script="Hang" typeface="맑은 고딕"/>
+        <a:font script="Hans" typeface="等线"/>
+        <a:font script="Hant" typeface="新細明體"/>
+        <a:font script="Arab" typeface="Arial"/>
+        <a:font script="Hebr" typeface="Arial"/>
+        <a:font script="Thai" typeface="Cordia New"/>
+        <a:font script="Ethi" typeface="Nyala"/>
+        <a:font script="Beng" typeface="Vrinda"/>
+        <a:font script="Gujr" typeface="Shruti"/>
+        <a:font script="Khmr" typeface="DaunPenh"/>
+        <a:font script="Knda" typeface="Tunga"/>
+        <a:font script="Guru" typeface="Raavi"/>
+        <a:font script="Cans" typeface="Euphemia"/>
+        <a:font script="Cher" typeface="Plantagenet Cherokee"/>
+        <a:font script="Yiii" typeface="Microsoft Yi Baiti"/>
+        <a:font script="Tibt" typeface="Microsoft Himalaya"/>
+        <a:font script="Thaa" typeface="MV Boli"/>
+        <a:font script="Deva" typeface="Mangal"/>
+        <a:font script="Telu" typeface="Gautami"/>
+        <a:font script="Taml" typeface="Latha"/>
+        <a:font script="Syrc" typeface="Estrangelo Edessa"/>
+        <a:font script="Orya" typeface="Kalinga"/>
+        <a:font script="Mlym" typeface="Kartika"/>
+        <a:font script="Laoo" typeface="DokChampa"/>
+        <a:font script="Sinh" typeface="Iskoola Pota"/>
+        <a:font script="Mong" typeface="Mongolian Baiti"/>
+        <a:font script="Viet" typeface="Arial"/>
+        <a:font script="Uigh" typeface="Microsoft Uighur"/>
+        <a:font script="Geor" typeface="Sylfaen"/>
+        <a:font script="Armn" typeface="Arial"/>
+        <a:font script="Bugi" typeface="Leelawadee UI"/>
+        <a:font script="Bopo" typeface="Microsoft JhengHei"/>
+        <a:font script="Java" typeface="Javanese Text"/>
+        <a:font script="Lisu" typeface="Segoe UI"/>
+        <a:font script="Mymr" typeface="Myanmar Text"/>
+        <a:font script="Nkoo" typeface="Ebrima"/>
+        <a:font script="Olck" typeface="Nirmala UI"/>
+        <a:font script="Osma" typeface="Ebrima"/>
+        <a:font script="Phag" typeface="Phagspa"/>
+        <a:font script="Syrn" typeface="Estrangelo Edessa"/>
+        <a:font script="Syrj" typeface="Estrangelo Edessa"/>
+        <a:font script="Syre" typeface="Estrangelo Edessa"/>
+        <a:font script="Sora" typeface="Nirmala UI"/>
+        <a:font script="Tale" typeface="Microsoft Tai Le"/>
+        <a:font script="Talu" typeface="Microsoft New Tai Lue"/>
+        <a:font script="Tfng" typeface="Ebrima"/>
+      </a:minorFont>
+    </a:fontScheme>
+    <a:fmtScheme name="Office">
+      <a:fillStyleLst>
+        <a:solidFill>
+          <a:schemeClr val="phClr"/>
+        </a:solidFill>
+        <a:gradFill rotWithShape="1">
+          <a:gsLst>
+            <a:gs pos="0">
+              <a:schemeClr val="phClr">
+                <a:lumMod val="110000"/>
+                <a:satMod val="105000"/>
+                <a:tint val="67000"/>
+              </a:schemeClr>
+            </a:gs>
+            <a:gs pos="50000">
+              <a:schemeClr val="phClr">
+                <a:lumMod val="105000"/>
+                <a:satMod val="103000"/>
+                <a:tint val="73000"/>
+              </a:schemeClr>
+            </a:gs>
+            <a:gs pos="100000">
+              <a:schemeClr val="phClr">
+                <a:lumMod val="105000"/>
+                <a:satMod val="109000"/>
+                <a:tint val="81000"/>
+              </a:schemeClr>
+            </a:gs>
+          </a:gsLst>
+          <a:lin ang="5400000" scaled="0"/>
+        </a:gradFill>
+        <a:gradFill rotWithShape="1">
+          <a:gsLst>
+            <a:gs pos="0">
+              <a:schemeClr val="phClr">
+                <a:satMod val="103000"/>
+                <a:lumMod val="102000"/>
+                <a:tint val="94000"/>
+              </a:schemeClr>
+            </a:gs>
+            <a:gs pos="50000">
+              <a:schemeClr val="phClr">
+                <a:satMod val="110000"/>
+                <a:lumMod val="100000"/>
+                <a:shade val="100000"/>
+              </a:schemeClr>
+            </a:gs>
+            <a:gs pos="100000">
+              <a:schemeClr val="phClr">
+                <a:lumMod val="99000"/>
+                <a:satMod val="120000"/>
+                <a:shade val="78000"/>
+              </a:schemeClr>
+            </a:gs>
+          </a:gsLst>
+          <a:lin ang="5400000" scaled="0"/>
+        </a:gradFill>
+      </a:fillStyleLst>
+      <a:lnStyleLst>
+        <a:ln w="12700" cap="flat" cmpd="sng" algn="ctr">
+          <a:solidFill>
+            <a:schemeClr val="phClr"/>
+          </a:solidFill>
+          <a:prstDash val="solid"/>
+          <a:miter lim="800000"/>
+        </a:ln>
+        <a:ln w="19050" cap="flat" cmpd="sng" algn="ctr">
+          <a:solidFill>
+            <a:schemeClr val="phClr"/>
+          </a:solidFill>
+          <a:prstDash val="solid"/>
+          <a:miter lim="800000"/>
+        </a:ln>
+        <a:ln w="25400" cap="flat" cmpd="sng" algn="ctr">
+          <a:solidFill>
+            <a:schemeClr val="phClr"/>
+          </a:solidFill>
+          <a:prstDash val="solid"/>
+          <a:miter lim="800000"/>
+        </a:ln>
+      </a:lnStyleLst>
+      <a:effectStyleLst>
+        <a:effectStyle>
+          <a:effectLst/>
+        </a:effectStyle>
+        <a:effectStyle>
+          <a:effectLst/>
+        </a:effectStyle>
+        <a:effectStyle>
+          <a:effectLst>
+            <a:outerShdw blurRad="57150" dist="19050" dir="5400000" algn="ctr" rotWithShape="0">
+              <a:srgbClr val="000000">
+                <a:alpha val="63000"/>
+              </a:srgbClr>
+            </a:outerShdw>
+          </a:effectLst>
+        </a:effectStyle>
+      </a:effectStyleLst>
+      <a:bgFillStyleLst>
+        <a:solidFill>
+          <a:schemeClr val="phClr"/>
+        </a:solidFill>
+        <a:solidFill>
+          <a:schemeClr val="phClr">
+            <a:tint val="95000"/>
+            <a:satMod val="170000"/>
+          </a:schemeClr>
+        </a:solidFill>
+        <a:gradFill rotWithShape="1">
+          <a:gsLst>
+            <a:gs pos="0">
+              <a:schemeClr val="phClr">
+                <a:tint val="93000"/>
+                <a:satMod val="150000"/>
+                <a:shade val="98000"/>
+                <a:lumMod val="102000"/>
+              </a:schemeClr>
+            </a:gs>
+            <a:gs pos="50000">
+              <a:schemeClr val="phClr">
+                <a:tint val="98000"/>
+                <a:satMod val="130000"/>
+                <a:shade val="90000"/>
+                <a:lumMod val="103000"/>
+              </a:schemeClr>
+            </a:gs>
+            <a:gs pos="100000">
+              <a:schemeClr val="phClr">
+                <a:shade val="63000"/>
+                <a:satMod val="120000"/>
+              </a:schemeClr>
+            </a:gs>
+          </a:gsLst>
+          <a:lin ang="5400000" scaled="0"/>
+        </a:gradFill>
+      </a:bgFillStyleLst>
+    </a:fmtScheme>
+  </a:themeElements>
+  <a:objectDefaults>
+    <a:lnDef>
+      <a:spPr/>
+      <a:bodyPr/>
+      <a:lstStyle/>
+      <a:style>
+        <a:lnRef idx="2">
+          <a:schemeClr val="accent1"/>
+        </a:lnRef>
+        <a:fillRef idx="0">
+          <a:schemeClr val="accent1"/>
+        </a:fillRef>
+        <a:effectRef idx="1">
+          <a:schemeClr val="accent1"/>
+        </a:effectRef>
+        <a:fontRef idx="minor">
+          <a:schemeClr val="tx1"/>
+        </a:fontRef>
+      </a:style>
+    </a:lnDef>
+  </a:objectDefaults>
+  <a:extraClrSchemeLst/>
+  <a:extLst>
+    <a:ext uri="{05A4C25C-085E-4340-85A3-A5531E510DB2}">
+      <thm15:themeFamily xmlns:thm15="http://schemas.microsoft.com/office/thememl/2012/main" name="Office Theme" id="{2E142A2C-CD16-42D6-873A-C26D2A0506FA}" vid="{1BDDFF52-6CD6-40A5-AB3C-68EB2F1E4D0A}"/>
+    </a:ext>
+  </a:extLst>
+</a:theme>
 </file>